--- a/Frontier_Tech_Leaders_Syria_SolarScope.pptx
+++ b/Frontier_Tech_Leaders_Syria_SolarScope.pptx
@@ -13289,7 +13289,7 @@
               <a:rPr lang="en-US" sz="1400" dirty="0">
                 <a:latin typeface="Microsoft YaHei Light" panose="020B0502040204020203" charset="-122"/>
               </a:rPr>
-              <a:t>LCOE: $0.070/kWh without batteries (42% below grid tier 2 at $0.122) and $0.117/kWh with batteries (about 4% below)</a:t>
+              <a:t>LCOE: $0.070/kWh without batteries (32% below grid tier 2 at $0.104) and $0.117/kWh with batteries (about 12% above)</a:t>
             </a:r>
             <a:endParaRPr lang="en-US" sz="1400" dirty="0">
               <a:latin typeface="Microsoft YaHei Light" panose="020B0502040204020203" charset="-122"/>
